--- a/content/week5_2024_Beforeclass.pptx
+++ b/content/week5_2024_Beforeclass.pptx
@@ -398,7 +398,7 @@
           <a:p>
             <a:fld id="{2299BF62-F315-46FD-A225-AF40715BD720}" type="datetimeFigureOut">
               <a:rPr lang="en-IE" smtClean="0"/>
-              <a:t>14/10/2024</a:t>
+              <a:t>23/10/2024</a:t>
             </a:fld>
             <a:endParaRPr lang="en-IE"/>
           </a:p>
@@ -563,7 +563,7 @@
           <a:p>
             <a:fld id="{C8585DF0-59FF-4857-9F82-F93A5D9DD461}" type="datetimeFigureOut">
               <a:rPr lang="en-IE" smtClean="0"/>
-              <a:t>14/10/2024</a:t>
+              <a:t>23/10/2024</a:t>
             </a:fld>
             <a:endParaRPr lang="en-IE"/>
           </a:p>
@@ -6430,7 +6430,7 @@
           <a:p>
             <a:fld id="{EA629649-D2FF-4264-8CCF-CA181E47AA8A}" type="datetimeFigureOut">
               <a:rPr lang="en-IE" smtClean="0"/>
-              <a:t>14/10/2024</a:t>
+              <a:t>23/10/2024</a:t>
             </a:fld>
             <a:endParaRPr lang="en-IE"/>
           </a:p>
@@ -6551,7 +6551,7 @@
           <a:p>
             <a:fld id="{EA629649-D2FF-4264-8CCF-CA181E47AA8A}" type="datetimeFigureOut">
               <a:rPr lang="en-IE" smtClean="0"/>
-              <a:t>14/10/2024</a:t>
+              <a:t>23/10/2024</a:t>
             </a:fld>
             <a:endParaRPr lang="en-IE"/>
           </a:p>
@@ -6916,7 +6916,7 @@
           <a:p>
             <a:fld id="{EA629649-D2FF-4264-8CCF-CA181E47AA8A}" type="datetimeFigureOut">
               <a:rPr lang="en-IE" smtClean="0"/>
-              <a:t>14/10/2024</a:t>
+              <a:t>23/10/2024</a:t>
             </a:fld>
             <a:endParaRPr lang="en-IE"/>
           </a:p>
@@ -7261,7 +7261,7 @@
           <a:p>
             <a:fld id="{EA629649-D2FF-4264-8CCF-CA181E47AA8A}" type="datetimeFigureOut">
               <a:rPr lang="en-IE" smtClean="0"/>
-              <a:t>14/10/2024</a:t>
+              <a:t>23/10/2024</a:t>
             </a:fld>
             <a:endParaRPr lang="en-IE"/>
           </a:p>
@@ -7513,7 +7513,7 @@
           <a:p>
             <a:fld id="{EA629649-D2FF-4264-8CCF-CA181E47AA8A}" type="datetimeFigureOut">
               <a:rPr lang="en-IE" smtClean="0"/>
-              <a:t>14/10/2024</a:t>
+              <a:t>23/10/2024</a:t>
             </a:fld>
             <a:endParaRPr lang="en-IE"/>
           </a:p>
@@ -7775,7 +7775,7 @@
           <a:p>
             <a:fld id="{EA629649-D2FF-4264-8CCF-CA181E47AA8A}" type="datetimeFigureOut">
               <a:rPr lang="en-IE" smtClean="0"/>
-              <a:t>14/10/2024</a:t>
+              <a:t>23/10/2024</a:t>
             </a:fld>
             <a:endParaRPr lang="en-IE"/>
           </a:p>
@@ -8035,7 +8035,7 @@
           <a:p>
             <a:fld id="{EA629649-D2FF-4264-8CCF-CA181E47AA8A}" type="datetimeFigureOut">
               <a:rPr lang="en-IE" smtClean="0"/>
-              <a:t>14/10/2024</a:t>
+              <a:t>23/10/2024</a:t>
             </a:fld>
             <a:endParaRPr lang="en-IE"/>
           </a:p>
@@ -8219,7 +8219,7 @@
           <a:p>
             <a:fld id="{EA629649-D2FF-4264-8CCF-CA181E47AA8A}" type="datetimeFigureOut">
               <a:rPr lang="en-IE" smtClean="0"/>
-              <a:t>14/10/2024</a:t>
+              <a:t>23/10/2024</a:t>
             </a:fld>
             <a:endParaRPr lang="en-IE"/>
           </a:p>
@@ -8670,7 +8670,7 @@
           <a:p>
             <a:fld id="{EA629649-D2FF-4264-8CCF-CA181E47AA8A}" type="datetimeFigureOut">
               <a:rPr lang="en-IE" smtClean="0"/>
-              <a:t>14/10/2024</a:t>
+              <a:t>23/10/2024</a:t>
             </a:fld>
             <a:endParaRPr lang="en-IE"/>
           </a:p>
@@ -8847,7 +8847,7 @@
           <a:p>
             <a:fld id="{EA629649-D2FF-4264-8CCF-CA181E47AA8A}" type="datetimeFigureOut">
               <a:rPr lang="en-IE" smtClean="0"/>
-              <a:t>14/10/2024</a:t>
+              <a:t>23/10/2024</a:t>
             </a:fld>
             <a:endParaRPr lang="en-IE"/>
           </a:p>
@@ -9230,7 +9230,7 @@
           <a:p>
             <a:fld id="{EA629649-D2FF-4264-8CCF-CA181E47AA8A}" type="datetimeFigureOut">
               <a:rPr lang="en-IE" smtClean="0"/>
-              <a:t>14/10/2024</a:t>
+              <a:t>23/10/2024</a:t>
             </a:fld>
             <a:endParaRPr lang="en-IE"/>
           </a:p>
@@ -9697,7 +9697,7 @@
           <a:p>
             <a:fld id="{EA629649-D2FF-4264-8CCF-CA181E47AA8A}" type="datetimeFigureOut">
               <a:rPr lang="en-IE" smtClean="0"/>
-              <a:t>14/10/2024</a:t>
+              <a:t>23/10/2024</a:t>
             </a:fld>
             <a:endParaRPr lang="en-IE"/>
           </a:p>
@@ -9891,7 +9891,7 @@
           <a:p>
             <a:fld id="{EA629649-D2FF-4264-8CCF-CA181E47AA8A}" type="datetimeFigureOut">
               <a:rPr lang="en-IE" smtClean="0"/>
-              <a:t>14/10/2024</a:t>
+              <a:t>23/10/2024</a:t>
             </a:fld>
             <a:endParaRPr lang="en-IE"/>
           </a:p>
@@ -10004,7 +10004,7 @@
           <a:p>
             <a:fld id="{EA629649-D2FF-4264-8CCF-CA181E47AA8A}" type="datetimeFigureOut">
               <a:rPr lang="en-IE" smtClean="0"/>
-              <a:t>14/10/2024</a:t>
+              <a:t>23/10/2024</a:t>
             </a:fld>
             <a:endParaRPr lang="en-IE"/>
           </a:p>
@@ -10248,7 +10248,7 @@
           <a:p>
             <a:fld id="{EA629649-D2FF-4264-8CCF-CA181E47AA8A}" type="datetimeFigureOut">
               <a:rPr lang="en-IE" smtClean="0"/>
-              <a:t>14/10/2024</a:t>
+              <a:t>23/10/2024</a:t>
             </a:fld>
             <a:endParaRPr lang="en-IE"/>
           </a:p>
@@ -27170,15 +27170,6 @@
 </file>
 
 <file path=customXml/item1.xml><?xml version="1.0" encoding="utf-8"?>
-<?mso-contentType ?>
-<FormTemplates xmlns="http://schemas.microsoft.com/sharepoint/v3/contenttype/forms">
-  <Display>DocumentLibraryForm</Display>
-  <Edit>DocumentLibraryForm</Edit>
-  <New>DocumentLibraryForm</New>
-</FormTemplates>
-</file>
-
-<file path=customXml/item2.xml><?xml version="1.0" encoding="utf-8"?>
 <p:properties xmlns:p="http://schemas.microsoft.com/office/2006/metadata/properties" xmlns:xsi="http://www.w3.org/2001/XMLSchema-instance" xmlns:pc="http://schemas.microsoft.com/office/infopath/2007/PartnerControls">
   <documentManagement>
     <_activity xmlns="186a8af6-524e-48fb-a2b5-8db5625d742b" xsi:nil="true"/>
@@ -27186,7 +27177,7 @@
 </p:properties>
 </file>
 
-<file path=customXml/item3.xml><?xml version="1.0" encoding="utf-8"?>
+<file path=customXml/item2.xml><?xml version="1.0" encoding="utf-8"?>
 <ct:contentTypeSchema xmlns:ct="http://schemas.microsoft.com/office/2006/metadata/contentType" xmlns:ma="http://schemas.microsoft.com/office/2006/metadata/properties/metaAttributes" ct:_="" ma:_="" ma:contentTypeName="Document" ma:contentTypeID="0x010100CE497A5DDE61EC49B38F08F69D7D1C30" ma:contentTypeVersion="15" ma:contentTypeDescription="Create a new document." ma:contentTypeScope="" ma:versionID="9bb0376d8ed59645cd949b27d95b7409">
   <xsd:schema xmlns:xsd="http://www.w3.org/2001/XMLSchema" xmlns:xs="http://www.w3.org/2001/XMLSchema" xmlns:p="http://schemas.microsoft.com/office/2006/metadata/properties" xmlns:ns3="186a8af6-524e-48fb-a2b5-8db5625d742b" xmlns:ns4="8713c86b-11c3-4892-8b22-8e1103c1c89f" targetNamespace="http://schemas.microsoft.com/office/2006/metadata/properties" ma:root="true" ma:fieldsID="dc57b1baf380e13117ae7081a2a87d27" ns3:_="" ns4:_="">
     <xsd:import namespace="186a8af6-524e-48fb-a2b5-8db5625d742b"/>
@@ -27421,15 +27412,16 @@
 </ct:contentTypeSchema>
 </file>
 
-<file path=customXml/itemProps1.xml><?xml version="1.0" encoding="utf-8"?>
-<ds:datastoreItem xmlns:ds="http://schemas.openxmlformats.org/officeDocument/2006/customXml" ds:itemID="{4EF0107A-F0F9-4F2F-8885-16CBFB37C1D3}">
-  <ds:schemaRefs>
-    <ds:schemaRef ds:uri="http://schemas.microsoft.com/sharepoint/v3/contenttype/forms"/>
-  </ds:schemaRefs>
-</ds:datastoreItem>
+<file path=customXml/item3.xml><?xml version="1.0" encoding="utf-8"?>
+<?mso-contentType ?>
+<FormTemplates xmlns="http://schemas.microsoft.com/sharepoint/v3/contenttype/forms">
+  <Display>DocumentLibraryForm</Display>
+  <Edit>DocumentLibraryForm</Edit>
+  <New>DocumentLibraryForm</New>
+</FormTemplates>
 </file>
 
-<file path=customXml/itemProps2.xml><?xml version="1.0" encoding="utf-8"?>
+<file path=customXml/itemProps1.xml><?xml version="1.0" encoding="utf-8"?>
 <ds:datastoreItem xmlns:ds="http://schemas.openxmlformats.org/officeDocument/2006/customXml" ds:itemID="{DBD80550-865F-444A-BC76-648199381973}">
   <ds:schemaRefs>
     <ds:schemaRef ds:uri="186a8af6-524e-48fb-a2b5-8db5625d742b"/>
@@ -27446,7 +27438,7 @@
 </ds:datastoreItem>
 </file>
 
-<file path=customXml/itemProps3.xml><?xml version="1.0" encoding="utf-8"?>
+<file path=customXml/itemProps2.xml><?xml version="1.0" encoding="utf-8"?>
 <ds:datastoreItem xmlns:ds="http://schemas.openxmlformats.org/officeDocument/2006/customXml" ds:itemID="{11F4D3FE-D829-488E-A486-DE7F38993728}">
   <ds:schemaRefs>
     <ds:schemaRef ds:uri="http://schemas.microsoft.com/office/2006/metadata/contentType"/>
@@ -27463,4 +27455,12 @@
     <ds:schemaRef ds:uri="http://schemas.microsoft.com/internal/obd"/>
   </ds:schemaRefs>
 </ds:datastoreItem>
+</file>
+
+<file path=customXml/itemProps3.xml><?xml version="1.0" encoding="utf-8"?>
+<ds:datastoreItem xmlns:ds="http://schemas.openxmlformats.org/officeDocument/2006/customXml" ds:itemID="{4EF0107A-F0F9-4F2F-8885-16CBFB37C1D3}">
+  <ds:schemaRefs>
+    <ds:schemaRef ds:uri="http://schemas.microsoft.com/sharepoint/v3/contenttype/forms"/>
+  </ds:schemaRefs>
+</ds:datastoreItem>
 </file>